--- a/presentation.pptx
+++ b/presentation.pptx
@@ -9311,7 +9311,7 @@
                 </a:solidFill>
                 <a:latin typeface="Calibri"/>
               </a:rPr>
-              <a:t>Два датасета из тезиса</a:t>
+              <a:t>Два датасета</a:t>
             </a:r>
           </a:p>
           <a:p>
@@ -9344,22 +9344,6 @@
                 <a:latin typeface="Calibri"/>
               </a:rPr>
               <a:t>Give Me Some Credit: стратифицированные 8000 из 150000, доля дефолтов 6,7%. В тесте 1600 строк.</a:t>
-            </a:r>
-          </a:p>
-          <a:p>
-            <a:pPr>
-              <a:spcBef>
-                <a:spcPts val="800"/>
-              </a:spcBef>
-            </a:pPr>
-            <a:r>
-              <a:rPr sz="1400" b="0">
-                <a:solidFill>
-                  <a:srgbClr val="1E2B40"/>
-                </a:solidFill>
-                <a:latin typeface="Calibri"/>
-              </a:rPr>
-              <a:t>Home Credit тем же кодом не считался: нужен локальный application_train.csv, полный файл слишком велик для CTGAN и Optuna в этом прогоне.</a:t>
             </a:r>
           </a:p>
         </p:txBody>
@@ -11933,7 +11917,7 @@
                 </a:solidFill>
                 <a:latin typeface="Calibri"/>
               </a:rPr>
-              <a:t>SMOTE ближе к данным: Вассерштейн 0.08 и 0.04. У CTGAN — 0.55 и 1.02. На логистической регрессии при 6,7% дефолтов CTGAN ухудшил PR-AUC и ROC-AUC. Прогон — один сплит; в тесте German 60 дефолтов; Home Credit не считался.</a:t>
+              <a:t>SMOTE ближе к данным: Вассерштейн 0.08 и 0.04. У CTGAN — 0.55 и 1.02. На логистической регрессии при 6,7% дефолтов CTGAN ухудшил PR-AUC и ROC-AUC. Прогон — один сплит; в тесте German 60 дефолтов.</a:t>
             </a:r>
           </a:p>
         </p:txBody>
